--- a/docs/BCVG-Company-Introduction.pptx
+++ b/docs/BCVG-Company-Introduction.pptx
@@ -5756,7 +5756,7 @@
                 <a:ea typeface="Inter"/>
                 <a:cs typeface="Inter"/>
               </a:rPr>
-              <a:t>(707) 532-5007</a:t>
+              <a:t>(530) 338-3391</a:t>
             </a:r>
           </a:p>
         </p:txBody>
